--- a/media/resources/files/Onduktar_Akcha_KalkulyatorsuzIshtoo_KazynaIzdoo_9i3eDex.pptx
+++ b/media/resources/files/Onduktar_Akcha_KalkulyatorsuzIshtoo_KazynaIzdoo_9i3eDex.pptx
@@ -17305,7 +17305,7 @@
                 <a:ea typeface="+mn-ea"/>
                 <a:cs typeface="+mn-cs"/>
               </a:rPr>
-              <a:t>Турдуу пикирлер учун ыраазычылык билдиребиз.</a:t>
+              <a:t>Түрдүү пикирлер үчүн ыраазычылык билдиребиз.</a:t>
             </a:r>
           </a:p>
           <a:p>

--- a/media/resources/files/Onduktar_Akcha_KalkulyatorsuzIshtoo_KazynaIzdoo_9i3eDex.pptx
+++ b/media/resources/files/Onduktar_Akcha_KalkulyatorsuzIshtoo_KazynaIzdoo_9i3eDex.pptx
@@ -4482,7 +4482,7 @@
             <a:pPr algn="ctr"/>
             <a:r>
               <a:rPr lang="ky-KG" sz="3200" dirty="0"/>
-              <a:t>Жаку 316 калемди ар бирин 22.18 сомго сатып алат.</a:t>
+              <a:t>Жаку 316 калемди ар бирин 22,18 сомго сатып алат.</a:t>
             </a:r>
           </a:p>
           <a:p>
@@ -5545,7 +5545,7 @@
                   <a:sysClr val="windowText" lastClr="000000"/>
                 </a:solidFill>
               </a:rPr>
-              <a:t>13972.</a:t>
+              <a:t>13972,</a:t>
             </a:r>
             <a:r>
               <a:rPr lang="ky-KG" sz="8800" b="0" dirty="0">
@@ -6189,7 +6189,7 @@
                   <a:sysClr val="windowText" lastClr="000000"/>
                 </a:solidFill>
               </a:rPr>
-              <a:t>201.74 сом</a:t>
+              <a:t>201,74 сом</a:t>
             </a:r>
             <a:endParaRPr lang="en-GB" sz="9600" b="0" dirty="0">
               <a:solidFill>
@@ -6764,14 +6764,14 @@
             <a:pPr algn="ctr"/>
             <a:r>
               <a:rPr lang="ky-KG" sz="3200" dirty="0"/>
-              <a:t>Ал ошол күнү 23620.63 сом төлөп </a:t>
+              <a:t>Ал ошол күнү 23620,63 сом төлөп </a:t>
             </a:r>
           </a:p>
           <a:p>
             <a:pPr algn="ctr"/>
             <a:r>
               <a:rPr lang="ky-KG" sz="3200" dirty="0"/>
-              <a:t>жана 2606.03 сомдон 12 ай бөлүп төлөйт.</a:t>
+              <a:t>жана 2606,03 сомдон 12 ай бөлүп төлөйт.</a:t>
             </a:r>
           </a:p>
           <a:p>
@@ -7238,7 +7238,7 @@
                   <a:sysClr val="windowText" lastClr="000000"/>
                 </a:solidFill>
               </a:rPr>
-              <a:t>54892.99 сом</a:t>
+              <a:t>54892,99 сом</a:t>
             </a:r>
             <a:endParaRPr lang="en-GB" sz="8800" b="0" dirty="0">
               <a:solidFill>
@@ -7297,7 +7297,7 @@
             <a:pPr algn="ctr"/>
             <a:r>
               <a:rPr lang="ky-KG" sz="3200" dirty="0"/>
-              <a:t>110.89 сом  алат.</a:t>
+              <a:t>110,89 сом  алат.</a:t>
             </a:r>
           </a:p>
           <a:p>
@@ -7756,7 +7756,7 @@
                   <a:sysClr val="windowText" lastClr="000000"/>
                 </a:solidFill>
               </a:rPr>
-              <a:t>9240.83 сом</a:t>
+              <a:t>9240,83 сом</a:t>
             </a:r>
             <a:endParaRPr lang="en-GB" sz="9600" b="0" dirty="0">
               <a:solidFill>
@@ -7797,14 +7797,14 @@
             <a:pPr algn="ctr"/>
             <a:r>
               <a:rPr lang="ky-KG" sz="3200" dirty="0"/>
-              <a:t>Кинотеатр балдар билети үчүн 300.53 сом, </a:t>
+              <a:t>Кинотеатр балдар билети үчүн 300,53 сом, </a:t>
             </a:r>
           </a:p>
           <a:p>
             <a:pPr algn="ctr"/>
             <a:r>
               <a:rPr lang="ky-KG" sz="3200" dirty="0"/>
-              <a:t>Чоңдор билети үчүн 599.94  сом алат.</a:t>
+              <a:t>Чоңдор билети үчүн 599,94  сом алат.</a:t>
             </a:r>
           </a:p>
           <a:p>
@@ -8270,7 +8270,7 @@
                   <a:sysClr val="windowText" lastClr="000000"/>
                 </a:solidFill>
               </a:rPr>
-              <a:t>3992.22</a:t>
+              <a:t>3992,22</a:t>
             </a:r>
             <a:r>
               <a:rPr lang="ky-KG" sz="9600" b="0" dirty="0">
@@ -8337,7 +8337,7 @@
             <a:pPr algn="ctr"/>
             <a:r>
               <a:rPr lang="ky-KG" sz="3200" dirty="0"/>
-              <a:t>Дүкөн ар бир суусундуктан 133.07 сом </a:t>
+              <a:t>Дүкөн ар бир суусундуктан 133,07 сом </a:t>
             </a:r>
           </a:p>
           <a:p>
@@ -8846,7 +8846,7 @@
             <a:pPr algn="ctr"/>
             <a:r>
               <a:rPr lang="ru-RU" sz="3200" dirty="0"/>
-              <a:t>Ал ар бири 25.51сомдон турган </a:t>
+              <a:t>Ал ар бири 25,51сомдон турган </a:t>
             </a:r>
           </a:p>
           <a:p>
@@ -8864,7 +8864,7 @@
             <a:pPr algn="ctr"/>
             <a:r>
               <a:rPr lang="ru-RU" sz="3200" dirty="0"/>
-              <a:t>Ал калганын ар бири 38.81 сом турган </a:t>
+              <a:t>Ал калганын ар бири 38,81 сом турган </a:t>
             </a:r>
             <a:endParaRPr lang="en-US" sz="3200" dirty="0"/>
           </a:p>
@@ -9429,7 +9429,7 @@
                             <a:sysClr val="windowText" lastClr="000000"/>
                           </a:solidFill>
                         </a:rPr>
-                        <a:t>2991.12 сом</a:t>
+                        <a:t>2991,12 сом</a:t>
                       </a:r>
                       <a:endParaRPr lang="en-GB" sz="3600" b="0" dirty="0">
                         <a:solidFill>
@@ -9913,7 +9913,7 @@
                             <a:sysClr val="windowText" lastClr="000000"/>
                           </a:solidFill>
                         </a:rPr>
-                        <a:t>201.74 сом</a:t>
+                        <a:t>201,74 сом</a:t>
                       </a:r>
                       <a:endParaRPr lang="en-GB" sz="3600" b="0" dirty="0">
                         <a:solidFill>
@@ -10041,7 +10041,7 @@
                             <a:sysClr val="windowText" lastClr="000000"/>
                           </a:solidFill>
                         </a:rPr>
-                        <a:t>674.24 сом</a:t>
+                        <a:t>674,24 сом</a:t>
                       </a:r>
                       <a:endParaRPr lang="en-GB" sz="3600" b="0" dirty="0">
                         <a:solidFill>
@@ -10285,7 +10285,7 @@
                             <a:sysClr val="windowText" lastClr="000000"/>
                           </a:solidFill>
                         </a:rPr>
-                        <a:t>23988.25</a:t>
+                        <a:t>23988,25</a:t>
                       </a:r>
                       <a:r>
                         <a:rPr lang="ky-KG" sz="3600" b="0" dirty="0">
@@ -10414,7 +10414,7 @@
                             <a:sysClr val="windowText" lastClr="000000"/>
                           </a:solidFill>
                         </a:rPr>
-                        <a:t>54892.99 сом</a:t>
+                        <a:t>54892,99 сом</a:t>
                       </a:r>
                       <a:endParaRPr lang="en-GB" sz="3600" b="0" dirty="0">
                         <a:solidFill>
@@ -10542,7 +10542,7 @@
                             <a:sysClr val="windowText" lastClr="000000"/>
                           </a:solidFill>
                         </a:rPr>
-                        <a:t>3992.22</a:t>
+                        <a:t>3992,22</a:t>
                       </a:r>
                       <a:r>
                         <a:rPr lang="ky-KG" sz="3600" b="0" dirty="0">
@@ -10671,7 +10671,7 @@
                             <a:sysClr val="windowText" lastClr="000000"/>
                           </a:solidFill>
                         </a:rPr>
-                        <a:t>9240.83 сом</a:t>
+                        <a:t>9240,83 сом</a:t>
                       </a:r>
                       <a:endParaRPr lang="en-GB" sz="3600" b="0" dirty="0">
                         <a:solidFill>
@@ -10799,7 +10799,7 @@
                             <a:sysClr val="windowText" lastClr="000000"/>
                           </a:solidFill>
                         </a:rPr>
-                        <a:t>13972.</a:t>
+                        <a:t>13972,</a:t>
                       </a:r>
                       <a:r>
                         <a:rPr lang="ky-KG" sz="3600" b="0" dirty="0">
@@ -10928,7 +10928,7 @@
                             <a:sysClr val="windowText" lastClr="000000"/>
                           </a:solidFill>
                         </a:rPr>
-                        <a:t>5402.82 сом</a:t>
+                        <a:t>5402,82 сом</a:t>
                       </a:r>
                       <a:endParaRPr lang="en-GB" sz="3600" b="0" dirty="0">
                         <a:solidFill>
@@ -11177,7 +11177,7 @@
                             <a:sysClr val="windowText" lastClr="000000"/>
                           </a:solidFill>
                         </a:rPr>
-                        <a:t>8,768.88</a:t>
+                        <a:t>8 768,88</a:t>
                       </a:r>
                       <a:r>
                         <a:rPr lang="ky-KG" sz="3600" b="0" dirty="0">
@@ -17919,7 +17919,7 @@
             <a:pPr algn="ctr"/>
             <a:r>
               <a:rPr lang="ky-KG" sz="9600" dirty="0"/>
-              <a:t>674.24сом</a:t>
+              <a:t>674,24сом</a:t>
             </a:r>
             <a:endParaRPr lang="en-GB" sz="11500" dirty="0"/>
           </a:p>
@@ -17977,7 +17977,7 @@
             <a:pPr algn="ctr"/>
             <a:r>
               <a:rPr lang="ky-KG" sz="3200" dirty="0"/>
-              <a:t>баасы 827.39 сом турат.</a:t>
+              <a:t>баасы 827,39 сом турат.</a:t>
             </a:r>
           </a:p>
           <a:p>
@@ -17991,7 +17991,7 @@
             <a:pPr algn="ctr"/>
             <a:r>
               <a:rPr lang="ky-KG" sz="3200" dirty="0"/>
-              <a:t>Баасы 3309.55 сом турат.</a:t>
+              <a:t>Баасы 3309,55 сом турат.</a:t>
             </a:r>
           </a:p>
           <a:p>
@@ -18449,7 +18449,7 @@
             <a:pPr algn="ctr"/>
             <a:r>
               <a:rPr lang="en-GB" sz="11500" dirty="0"/>
-              <a:t>23988.25c</a:t>
+              <a:t>23988,25c</a:t>
             </a:r>
           </a:p>
         </p:txBody>
@@ -18485,7 +18485,7 @@
             <a:pPr algn="ctr"/>
             <a:r>
               <a:rPr lang="ky-KG" sz="3200" dirty="0"/>
-              <a:t>Том 76295.75 сомго жаңы компьютер сатып алат.</a:t>
+              <a:t>Том 76295,75 сомго жаңы компьютер сатып алат.</a:t>
             </a:r>
           </a:p>
           <a:p>
@@ -18496,7 +18496,7 @@
             <a:pPr algn="ctr"/>
             <a:r>
               <a:rPr lang="ky-KG" sz="3200" dirty="0"/>
-              <a:t>Ал 28389.12 сомду алдын ала төлөп, </a:t>
+              <a:t>Ал 28389,12 сомду алдын ала төлөп, </a:t>
             </a:r>
             <a:endParaRPr lang="en-US" sz="3200" dirty="0"/>
           </a:p>
@@ -18995,7 +18995,7 @@
             <a:pPr algn="ctr"/>
             <a:r>
               <a:rPr lang="ky-KG" sz="3200" dirty="0"/>
-              <a:t>Бир бургер 155.43 сом турат.</a:t>
+              <a:t>Бир бургер 155,43 сом турат.</a:t>
             </a:r>
           </a:p>
           <a:p>
@@ -19006,7 +19006,7 @@
             <a:pPr algn="ctr"/>
             <a:r>
               <a:rPr lang="ky-KG" sz="3200" dirty="0"/>
-              <a:t>12 гамбургердин бир таңгагы 1663.42 сом турат.</a:t>
+              <a:t>12 гамбургердин бир таңгагы 1663,42 сом турат.</a:t>
             </a:r>
           </a:p>
           <a:p>
@@ -19509,7 +19509,7 @@
             <a:pPr algn="ctr"/>
             <a:r>
               <a:rPr lang="ky-KG" sz="3200" dirty="0"/>
-              <a:t>Даниар 62.10 сомдон турган </a:t>
+              <a:t>Даниар 62,10 сомдон турган </a:t>
             </a:r>
           </a:p>
           <a:p>
@@ -19527,7 +19527,7 @@
             <a:pPr algn="ctr"/>
             <a:r>
               <a:rPr lang="ky-KG" sz="3200" dirty="0"/>
-              <a:t>Аларды 83.17 сомдон сатат.</a:t>
+              <a:t>Аларды 83,17 сомдон сатат.</a:t>
             </a:r>
           </a:p>
           <a:p>
@@ -19997,7 +19997,7 @@
                   <a:sysClr val="windowText" lastClr="000000"/>
                 </a:solidFill>
               </a:rPr>
-              <a:t>5402.82 сом</a:t>
+              <a:t>5402,82 сом</a:t>
             </a:r>
             <a:endParaRPr lang="en-GB" sz="9600" b="0" dirty="0">
               <a:solidFill>
@@ -20049,7 +20049,7 @@
             <a:pPr algn="ctr"/>
             <a:r>
               <a:rPr lang="ky-KG" sz="3200" dirty="0"/>
-              <a:t>532.30 сомго ,ал 8 мончок жасоого керектүү </a:t>
+              <a:t>532,30 сомго,ал 8 мончок жасоого керектүү </a:t>
             </a:r>
           </a:p>
           <a:p>
@@ -20070,7 +20070,7 @@
             <a:pPr algn="ctr"/>
             <a:r>
               <a:rPr lang="ky-KG" sz="3200" dirty="0"/>
-              <a:t>ар бирин 121.79 сомдон  сатат.</a:t>
+              <a:t>ар бирин 121,79 сомдон  сатат.</a:t>
             </a:r>
           </a:p>
           <a:p>
@@ -20529,7 +20529,7 @@
                   <a:sysClr val="windowText" lastClr="000000"/>
                 </a:solidFill>
               </a:rPr>
-              <a:t>2991.12 сом</a:t>
+              <a:t>2991,12 сом</a:t>
             </a:r>
             <a:endParaRPr lang="en-GB" sz="9600" b="0" dirty="0">
               <a:solidFill>
@@ -21050,7 +21050,7 @@
             <a:pPr algn="ctr"/>
             <a:r>
               <a:rPr lang="ky-KG" sz="3200" dirty="0"/>
-              <a:t>Азамат 426 окуучуга , тематикалык паркка </a:t>
+              <a:t>Азамат 426 окуучуга, тематикалык паркка </a:t>
             </a:r>
           </a:p>
           <a:p>
@@ -21123,7 +21123,7 @@
             <a:pPr algn="ctr"/>
             <a:r>
               <a:rPr lang="en-GB" sz="9600" dirty="0"/>
-              <a:t>8768.88</a:t>
+              <a:t>8768,88</a:t>
             </a:r>
             <a:r>
               <a:rPr lang="ky-KG" sz="9600" dirty="0"/>

--- a/media/resources/files/Onduktar_Akcha_KalkulyatorsuzIshtoo_KazynaIzdoo_9i3eDex.pptx
+++ b/media/resources/files/Onduktar_Akcha_KalkulyatorsuzIshtoo_KazynaIzdoo_9i3eDex.pptx
@@ -4493,7 +4493,7 @@
             <a:pPr algn="ctr"/>
             <a:r>
               <a:rPr lang="ky-KG" sz="3200" dirty="0"/>
-              <a:t>Ал аларды жалпысынан 10000 сомго сатат.</a:t>
+              <a:t>Ал аларды жалпысынан 10 000 сомго сатат.</a:t>
             </a:r>
           </a:p>
           <a:p>
@@ -5545,7 +5545,7 @@
                   <a:sysClr val="windowText" lastClr="000000"/>
                 </a:solidFill>
               </a:rPr>
-              <a:t>13972,</a:t>
+              <a:t>13 972,</a:t>
             </a:r>
             <a:r>
               <a:rPr lang="ky-KG" sz="8800" b="0" dirty="0">
@@ -6764,7 +6764,7 @@
             <a:pPr algn="ctr"/>
             <a:r>
               <a:rPr lang="ky-KG" sz="3200" dirty="0"/>
-              <a:t>Ал ошол күнү 23620,63 сом төлөп </a:t>
+              <a:t>Ал ошол күнү 23 620,63 сом төлөп </a:t>
             </a:r>
           </a:p>
           <a:p>
@@ -7238,7 +7238,7 @@
                   <a:sysClr val="windowText" lastClr="000000"/>
                 </a:solidFill>
               </a:rPr>
-              <a:t>54892,99 сом</a:t>
+              <a:t>54 892,99 сом</a:t>
             </a:r>
             <a:endParaRPr lang="en-GB" sz="8800" b="0" dirty="0">
               <a:solidFill>
@@ -10285,7 +10285,7 @@
                             <a:sysClr val="windowText" lastClr="000000"/>
                           </a:solidFill>
                         </a:rPr>
-                        <a:t>23988,25</a:t>
+                        <a:t>23 988,25</a:t>
                       </a:r>
                       <a:r>
                         <a:rPr lang="ky-KG" sz="3600" b="0" dirty="0">
@@ -10414,7 +10414,7 @@
                             <a:sysClr val="windowText" lastClr="000000"/>
                           </a:solidFill>
                         </a:rPr>
-                        <a:t>54892,99 сом</a:t>
+                        <a:t>54 892,99 сом</a:t>
                       </a:r>
                       <a:endParaRPr lang="en-GB" sz="3600" b="0" dirty="0">
                         <a:solidFill>
@@ -10799,7 +10799,7 @@
                             <a:sysClr val="windowText" lastClr="000000"/>
                           </a:solidFill>
                         </a:rPr>
-                        <a:t>13972,</a:t>
+                        <a:t>13 972,</a:t>
                       </a:r>
                       <a:r>
                         <a:rPr lang="ky-KG" sz="3600" b="0" dirty="0">
@@ -18449,7 +18449,7 @@
             <a:pPr algn="ctr"/>
             <a:r>
               <a:rPr lang="en-GB" sz="11500" dirty="0"/>
-              <a:t>23988,25c</a:t>
+              <a:t>23 988,25c</a:t>
             </a:r>
           </a:p>
         </p:txBody>
@@ -18485,7 +18485,7 @@
             <a:pPr algn="ctr"/>
             <a:r>
               <a:rPr lang="ky-KG" sz="3200" dirty="0"/>
-              <a:t>Том 76295,75 сомго жаңы компьютер сатып алат.</a:t>
+              <a:t>Том 76 295,75 сомго жаңы компьютер сатып алат.</a:t>
             </a:r>
           </a:p>
           <a:p>
@@ -18496,7 +18496,7 @@
             <a:pPr algn="ctr"/>
             <a:r>
               <a:rPr lang="ky-KG" sz="3200" dirty="0"/>
-              <a:t>Ал 28389,12 сомду алдын ала төлөп, </a:t>
+              <a:t>Ал 28 389,12 сомду алдын ала төлөп, </a:t>
             </a:r>
             <a:endParaRPr lang="en-US" sz="3200" dirty="0"/>
           </a:p>
